--- a/Assignment 4 - Rama Mathur C52 - Deck.pptx
+++ b/Assignment 4 - Rama Mathur C52 - Deck.pptx
@@ -2252,6 +2252,10 @@
             <a:prstDash val="solid"/>
           </a:ln>
         </p:spPr>
+        <p:txBody>
+          <a:bodyPr/>
+          <a:p/>
+        </p:txBody>
       </p:sp>
       <p:sp>
         <p:nvSpPr>
@@ -2423,6 +2427,10 @@
             <a:prstDash val="solid"/>
           </a:ln>
         </p:spPr>
+        <p:txBody>
+          <a:bodyPr/>
+          <a:p/>
+        </p:txBody>
       </p:sp>
       <p:sp>
         <p:nvSpPr>
@@ -2481,18 +2489,22 @@
           <a:bodyPr wrap="square" lIns="0" tIns="0" rIns="0" bIns="0" rtlCol="0" anchor="t"/>
           <a:lstStyle/>
           <a:p>
-            <a:pPr indent="0" marL="0">
-              <a:buNone/>
-            </a:pPr>
-            <a:r>
-              <a:rPr lang="en-US" sz="1520" dirty="0">
-                <a:solidFill>
-                  <a:srgbClr val="2B3150"/>
-                </a:solidFill>
-              </a:rPr>
-              <a:t>Invite 10 PMs from existing professional networks, LinkedIn, and relevant PM communities. Give them a real scenario to practise.</a:t>
-            </a:r>
-            <a:endParaRPr lang="en-US" sz="1520" dirty="0"/>
+            <a:r>
+              <a:rPr sz="1400"/>
+              <a:t>Initial 10 PM users identified:</a:t>
+            </a:r>
+          </a:p>
+          <a:p>
+            <a:r>
+              <a:rPr sz="1400"/>
+              <a:t>5 colleagues · 4 HelloPM peers · 1 friend.</a:t>
+            </a:r>
+          </a:p>
+          <a:p>
+            <a:r>
+              <a:rPr sz="1400"/>
+              <a:t>Invite each to practise one real stakeholder scenario.</a:t>
+            </a:r>
           </a:p>
         </p:txBody>
       </p:sp>
@@ -2522,6 +2534,10 @@
             <a:prstDash val="solid"/>
           </a:ln>
         </p:spPr>
+        <p:txBody>
+          <a:bodyPr/>
+          <a:p/>
+        </p:txBody>
       </p:sp>
       <p:sp>
         <p:nvSpPr>
@@ -2621,6 +2637,10 @@
             <a:prstDash val="solid"/>
           </a:ln>
         </p:spPr>
+        <p:txBody>
+          <a:bodyPr/>
+          <a:p/>
+        </p:txBody>
       </p:sp>
       <p:sp>
         <p:nvSpPr>
@@ -2720,6 +2740,10 @@
             <a:prstDash val="solid"/>
           </a:ln>
         </p:spPr>
+        <p:txBody>
+          <a:bodyPr/>
+          <a:p/>
+        </p:txBody>
       </p:sp>
       <p:sp>
         <p:nvSpPr>
@@ -2778,18 +2802,10 @@
           <a:bodyPr wrap="square" lIns="0" tIns="0" rIns="0" bIns="0" rtlCol="0" anchor="ctr"/>
           <a:lstStyle/>
           <a:p>
-            <a:pPr indent="0" marL="0">
-              <a:buNone/>
-            </a:pPr>
-            <a:r>
-              <a:rPr lang="en-US" sz="1500" dirty="0">
-                <a:solidFill>
-                  <a:srgbClr val="2B3150"/>
-                </a:solidFill>
-              </a:rPr>
-              <a:t>10 users invited  •  First-session completion  •  Feedback usefulness  •  14-day repeat practice</a:t>
-            </a:r>
-            <a:endParaRPr lang="en-US" sz="1500" dirty="0"/>
+            <a:r>
+              <a:rPr sz="1300"/>
+              <a:t>10 named first users  •  Track completed sessions  •  Feedback usefulness  •  14-day return</a:t>
+            </a:r>
           </a:p>
         </p:txBody>
       </p:sp>
@@ -2826,6 +2842,41 @@
               <a:t>Live demo: mycommpal.vercel.app   |   Source: github.com/ramachinthapalli-ghub/mycommpal</a:t>
             </a:r>
             <a:endParaRPr lang="en-US" sz="1220" dirty="0"/>
+          </a:p>
+        </p:txBody>
+      </p:sp>
+      <p:sp>
+        <p:nvSpPr>
+          <p:cNvPr id="20" name="TextBox 19"/>
+          <p:cNvSpPr txBox="1"/>
+          <p:nvPr/>
+        </p:nvSpPr>
+        <p:spPr>
+          <a:xfrm>
+            <a:off x="822960" y="4434840"/>
+            <a:ext cx="10698480" cy="274320"/>
+          </a:xfrm>
+          <a:prstGeom prst="rect">
+            <a:avLst/>
+          </a:prstGeom>
+          <a:noFill/>
+        </p:spPr>
+        <p:txBody>
+          <a:bodyPr wrap="none">
+            <a:spAutoFit/>
+          </a:bodyPr>
+          <a:lstStyle/>
+          <a:p>
+            <a:pPr>
+              <a:defRPr sz="1300" b="1">
+                <a:solidFill>
+                  <a:srgbClr val="4832AA"/>
+                </a:solidFill>
+              </a:defRPr>
+            </a:pPr>
+            <a:r>
+              <a:t>Bhavana · Vivek · Srikanth · Naresh · Santosh  |  Charith · Manav · Nikhil · Chinmay  |  Ratan</a:t>
+            </a:r>
           </a:p>
         </p:txBody>
       </p:sp>
@@ -2887,6 +2938,10 @@
             <a:prstDash val="solid"/>
           </a:ln>
         </p:spPr>
+        <p:txBody>
+          <a:bodyPr/>
+          <a:p/>
+        </p:txBody>
       </p:sp>
       <p:sp>
         <p:nvSpPr>
@@ -3022,6 +3077,10 @@
             <a:prstDash val="solid"/>
           </a:ln>
         </p:spPr>
+        <p:txBody>
+          <a:bodyPr/>
+          <a:p/>
+        </p:txBody>
       </p:sp>
       <p:sp>
         <p:nvSpPr>
@@ -3049,6 +3108,10 @@
             <a:prstDash val="solid"/>
           </a:ln>
         </p:spPr>
+        <p:txBody>
+          <a:bodyPr/>
+          <a:p/>
+        </p:txBody>
       </p:sp>
       <p:sp>
         <p:nvSpPr>
@@ -3179,18 +3242,10 @@
           <a:bodyPr wrap="square" lIns="0" tIns="0" rIns="0" bIns="0" rtlCol="0" anchor="ctr"/>
           <a:lstStyle/>
           <a:p>
-            <a:pPr algn="ctr" indent="0" marL="0">
-              <a:buNone/>
-            </a:pPr>
-            <a:r>
-              <a:rPr lang="en-US" sz="1300" dirty="0">
-                <a:solidFill>
-                  <a:srgbClr val="2B3150"/>
-                </a:solidFill>
-              </a:rPr>
-              <a:t>PM network + LinkedIn + PM WhatsApp groups</a:t>
-            </a:r>
-            <a:endParaRPr lang="en-US" sz="1300" dirty="0"/>
+            <a:r>
+              <a:rPr sz="1500"/>
+              <a:t>5 colleagues + 4 HelloPM peers + 1 friend</a:t>
+            </a:r>
           </a:p>
         </p:txBody>
       </p:sp>
@@ -3220,6 +3275,10 @@
             <a:prstDash val="solid"/>
           </a:ln>
         </p:spPr>
+        <p:txBody>
+          <a:bodyPr/>
+          <a:p/>
+        </p:txBody>
       </p:sp>
       <p:sp>
         <p:nvSpPr>
@@ -3247,6 +3306,10 @@
             <a:prstDash val="solid"/>
           </a:ln>
         </p:spPr>
+        <p:txBody>
+          <a:bodyPr/>
+          <a:p/>
+        </p:txBody>
       </p:sp>
       <p:sp>
         <p:nvSpPr>
@@ -3418,6 +3481,10 @@
             <a:prstDash val="solid"/>
           </a:ln>
         </p:spPr>
+        <p:txBody>
+          <a:bodyPr/>
+          <a:p/>
+        </p:txBody>
       </p:sp>
       <p:sp>
         <p:nvSpPr>
@@ -3445,6 +3512,10 @@
             <a:prstDash val="solid"/>
           </a:ln>
         </p:spPr>
+        <p:txBody>
+          <a:bodyPr/>
+          <a:p/>
+        </p:txBody>
       </p:sp>
       <p:sp>
         <p:nvSpPr>
@@ -3616,6 +3687,10 @@
             <a:prstDash val="solid"/>
           </a:ln>
         </p:spPr>
+        <p:txBody>
+          <a:bodyPr/>
+          <a:p/>
+        </p:txBody>
       </p:sp>
       <p:sp>
         <p:nvSpPr>
@@ -3643,6 +3718,10 @@
             <a:prstDash val="solid"/>
           </a:ln>
         </p:spPr>
+        <p:txBody>
+          <a:bodyPr/>
+          <a:p/>
+        </p:txBody>
       </p:sp>
       <p:sp>
         <p:nvSpPr>
@@ -3814,6 +3893,10 @@
             <a:prstDash val="solid"/>
           </a:ln>
         </p:spPr>
+        <p:txBody>
+          <a:bodyPr/>
+          <a:p/>
+        </p:txBody>
       </p:sp>
       <p:sp>
         <p:nvSpPr>
@@ -3841,6 +3924,10 @@
             <a:prstDash val="solid"/>
           </a:ln>
         </p:spPr>
+        <p:txBody>
+          <a:bodyPr/>
+          <a:p/>
+        </p:txBody>
       </p:sp>
       <p:sp>
         <p:nvSpPr>
@@ -4012,6 +4099,10 @@
             <a:prstDash val="solid"/>
           </a:ln>
         </p:spPr>
+        <p:txBody>
+          <a:bodyPr/>
+          <a:p/>
+        </p:txBody>
       </p:sp>
       <p:sp>
         <p:nvSpPr>
